--- a/docs/marketing/Introducing Turas v6.pptx
+++ b/docs/marketing/Introducing Turas v6.pptx
@@ -10,18 +10,18 @@
   <p:sldIdLst>
     <p:sldId id="358" r:id="rId2"/>
     <p:sldId id="332" r:id="rId3"/>
-    <p:sldId id="353" r:id="rId4"/>
-    <p:sldId id="323" r:id="rId5"/>
-    <p:sldId id="334" r:id="rId6"/>
-    <p:sldId id="325" r:id="rId7"/>
-    <p:sldId id="349" r:id="rId8"/>
-    <p:sldId id="359" r:id="rId9"/>
-    <p:sldId id="364" r:id="rId10"/>
+    <p:sldId id="368" r:id="rId4"/>
+    <p:sldId id="369" r:id="rId5"/>
+    <p:sldId id="370" r:id="rId6"/>
+    <p:sldId id="371" r:id="rId7"/>
+    <p:sldId id="372" r:id="rId8"/>
+    <p:sldId id="381" r:id="rId9"/>
+    <p:sldId id="374" r:id="rId10"/>
     <p:sldId id="352" r:id="rId11"/>
-    <p:sldId id="329" r:id="rId12"/>
-    <p:sldId id="348" r:id="rId13"/>
+    <p:sldId id="376" r:id="rId12"/>
+    <p:sldId id="387" r:id="rId13"/>
     <p:sldId id="331" r:id="rId14"/>
-    <p:sldId id="346" r:id="rId15"/>
+    <p:sldId id="378" r:id="rId15"/>
   </p:sldIdLst>
   <p:sldSz cx="12192000" cy="6858000"/>
   <p:notesSz cx="6858000" cy="9144000"/>
@@ -177,7 +177,7 @@
             </a:lvl1pPr>
           </a:lstStyle>
           <a:p>
-            <a:endParaRPr lang="en-GB"/>
+            <a:endParaRPr lang="en-GB" dirty="0"/>
           </a:p>
         </p:txBody>
       </p:sp>
@@ -212,7 +212,7 @@
               <a:rPr lang="en-GB" smtClean="0"/>
               <a:t>16/03/2026</a:t>
             </a:fld>
-            <a:endParaRPr lang="en-GB"/>
+            <a:endParaRPr lang="en-GB" dirty="0"/>
           </a:p>
         </p:txBody>
       </p:sp>
@@ -245,7 +245,7 @@
           <a:bodyPr vert="horz" lIns="91440" tIns="45720" rIns="91440" bIns="45720" rtlCol="0" anchor="ctr"/>
           <a:lstStyle/>
           <a:p>
-            <a:endParaRPr lang="en-GB"/>
+            <a:endParaRPr lang="en-GB" dirty="0"/>
           </a:p>
         </p:txBody>
       </p:sp>
@@ -335,7 +335,7 @@
             </a:lvl1pPr>
           </a:lstStyle>
           <a:p>
-            <a:endParaRPr lang="en-GB"/>
+            <a:endParaRPr lang="en-GB" dirty="0"/>
           </a:p>
         </p:txBody>
       </p:sp>
@@ -370,7 +370,7 @@
               <a:rPr lang="en-GB" smtClean="0"/>
               <a:t>‹#›</a:t>
             </a:fld>
-            <a:endParaRPr lang="en-GB"/>
+            <a:endParaRPr lang="en-GB" dirty="0"/>
           </a:p>
         </p:txBody>
       </p:sp>
@@ -505,6 +505,13 @@
           </p:nvPr>
         </p:nvSpPr>
         <p:spPr/>
+        <p:txBody>
+          <a:bodyPr/>
+          <a:lstStyle/>
+          <a:p>
+            <a:endParaRPr lang="en-GB" dirty="0"/>
+          </a:p>
+        </p:txBody>
       </p:sp>
       <p:sp>
         <p:nvSpPr>
@@ -544,7 +551,7 @@
               <a:rPr lang="en-US"/>
               <a:t>2</a:t>
             </a:fld>
-            <a:endParaRPr lang="en-US"/>
+            <a:endParaRPr lang="en-US" dirty="0"/>
           </a:p>
         </p:txBody>
       </p:sp>
@@ -601,6 +608,13 @@
           </p:nvPr>
         </p:nvSpPr>
         <p:spPr/>
+        <p:txBody>
+          <a:bodyPr/>
+          <a:lstStyle/>
+          <a:p>
+            <a:endParaRPr lang="en-GB" dirty="0"/>
+          </a:p>
+        </p:txBody>
       </p:sp>
       <p:sp>
         <p:nvSpPr>
@@ -652,7 +666,7 @@
               <a:rPr lang="en-US"/>
               <a:t>11</a:t>
             </a:fld>
-            <a:endParaRPr lang="en-US"/>
+            <a:endParaRPr lang="en-US" dirty="0"/>
           </a:p>
         </p:txBody>
       </p:sp>
@@ -709,6 +723,13 @@
           </p:nvPr>
         </p:nvSpPr>
         <p:spPr/>
+        <p:txBody>
+          <a:bodyPr/>
+          <a:lstStyle/>
+          <a:p>
+            <a:endParaRPr lang="en-GB" dirty="0"/>
+          </a:p>
+        </p:txBody>
       </p:sp>
       <p:sp>
         <p:nvSpPr>
@@ -760,7 +781,7 @@
               <a:rPr lang="en-US"/>
               <a:t>12</a:t>
             </a:fld>
-            <a:endParaRPr lang="en-US"/>
+            <a:endParaRPr lang="en-US" dirty="0"/>
           </a:p>
         </p:txBody>
       </p:sp>
@@ -817,6 +838,13 @@
           </p:nvPr>
         </p:nvSpPr>
         <p:spPr/>
+        <p:txBody>
+          <a:bodyPr/>
+          <a:lstStyle/>
+          <a:p>
+            <a:endParaRPr lang="en-GB" dirty="0"/>
+          </a:p>
+        </p:txBody>
       </p:sp>
       <p:sp>
         <p:nvSpPr>
@@ -868,7 +896,7 @@
               <a:rPr lang="en-US"/>
               <a:t>13</a:t>
             </a:fld>
-            <a:endParaRPr lang="en-US"/>
+            <a:endParaRPr lang="en-US" dirty="0"/>
           </a:p>
         </p:txBody>
       </p:sp>
@@ -913,6 +941,13 @@
           </p:nvPr>
         </p:nvSpPr>
         <p:spPr/>
+        <p:txBody>
+          <a:bodyPr/>
+          <a:lstStyle/>
+          <a:p>
+            <a:endParaRPr lang="en-GB" dirty="0"/>
+          </a:p>
+        </p:txBody>
       </p:sp>
       <p:sp>
         <p:nvSpPr>
@@ -952,7 +987,7 @@
               <a:rPr lang="en-US"/>
               <a:t>3</a:t>
             </a:fld>
-            <a:endParaRPr lang="en-US"/>
+            <a:endParaRPr lang="en-US" dirty="0"/>
           </a:p>
         </p:txBody>
       </p:sp>
@@ -997,6 +1032,13 @@
           </p:nvPr>
         </p:nvSpPr>
         <p:spPr/>
+        <p:txBody>
+          <a:bodyPr/>
+          <a:lstStyle/>
+          <a:p>
+            <a:endParaRPr lang="en-GB" dirty="0"/>
+          </a:p>
+        </p:txBody>
       </p:sp>
       <p:sp>
         <p:nvSpPr>
@@ -1036,7 +1078,7 @@
               <a:rPr lang="en-US"/>
               <a:t>4</a:t>
             </a:fld>
-            <a:endParaRPr lang="en-US"/>
+            <a:endParaRPr lang="en-US" dirty="0"/>
           </a:p>
         </p:txBody>
       </p:sp>
@@ -1093,6 +1135,13 @@
           </p:nvPr>
         </p:nvSpPr>
         <p:spPr/>
+        <p:txBody>
+          <a:bodyPr/>
+          <a:lstStyle/>
+          <a:p>
+            <a:endParaRPr lang="en-GB" dirty="0"/>
+          </a:p>
+        </p:txBody>
       </p:sp>
       <p:sp>
         <p:nvSpPr>
@@ -1144,7 +1193,7 @@
               <a:rPr lang="en-US"/>
               <a:t>5</a:t>
             </a:fld>
-            <a:endParaRPr lang="en-US"/>
+            <a:endParaRPr lang="en-US" dirty="0"/>
           </a:p>
         </p:txBody>
       </p:sp>
@@ -1201,6 +1250,13 @@
           </p:nvPr>
         </p:nvSpPr>
         <p:spPr/>
+        <p:txBody>
+          <a:bodyPr/>
+          <a:lstStyle/>
+          <a:p>
+            <a:endParaRPr lang="en-GB" dirty="0"/>
+          </a:p>
+        </p:txBody>
       </p:sp>
       <p:sp>
         <p:nvSpPr>
@@ -1252,7 +1308,7 @@
               <a:rPr lang="en-US"/>
               <a:t>6</a:t>
             </a:fld>
-            <a:endParaRPr lang="en-US"/>
+            <a:endParaRPr lang="en-US" dirty="0"/>
           </a:p>
         </p:txBody>
       </p:sp>
@@ -1309,6 +1365,13 @@
           </p:nvPr>
         </p:nvSpPr>
         <p:spPr/>
+        <p:txBody>
+          <a:bodyPr/>
+          <a:lstStyle/>
+          <a:p>
+            <a:endParaRPr lang="en-GB" dirty="0"/>
+          </a:p>
+        </p:txBody>
       </p:sp>
       <p:sp>
         <p:nvSpPr>
@@ -1360,7 +1423,7 @@
               <a:rPr lang="en-US"/>
               <a:t>7</a:t>
             </a:fld>
-            <a:endParaRPr lang="en-US"/>
+            <a:endParaRPr lang="en-US" dirty="0"/>
           </a:p>
         </p:txBody>
       </p:sp>
@@ -1417,6 +1480,13 @@
           </p:nvPr>
         </p:nvSpPr>
         <p:spPr/>
+        <p:txBody>
+          <a:bodyPr/>
+          <a:lstStyle/>
+          <a:p>
+            <a:endParaRPr lang="en-GB" dirty="0"/>
+          </a:p>
+        </p:txBody>
       </p:sp>
       <p:sp>
         <p:nvSpPr>
@@ -1468,7 +1538,7 @@
               <a:rPr lang="en-US"/>
               <a:t>8</a:t>
             </a:fld>
-            <a:endParaRPr lang="en-US"/>
+            <a:endParaRPr lang="en-US" dirty="0"/>
           </a:p>
         </p:txBody>
       </p:sp>
@@ -1525,6 +1595,13 @@
           </p:nvPr>
         </p:nvSpPr>
         <p:spPr/>
+        <p:txBody>
+          <a:bodyPr/>
+          <a:lstStyle/>
+          <a:p>
+            <a:endParaRPr lang="en-GB" dirty="0"/>
+          </a:p>
+        </p:txBody>
       </p:sp>
       <p:sp>
         <p:nvSpPr>
@@ -1576,7 +1653,7 @@
               <a:rPr lang="en-US"/>
               <a:t>9</a:t>
             </a:fld>
-            <a:endParaRPr lang="en-US"/>
+            <a:endParaRPr lang="en-US" dirty="0"/>
           </a:p>
         </p:txBody>
       </p:sp>
@@ -1633,6 +1710,13 @@
           </p:nvPr>
         </p:nvSpPr>
         <p:spPr/>
+        <p:txBody>
+          <a:bodyPr/>
+          <a:lstStyle/>
+          <a:p>
+            <a:endParaRPr lang="en-GB"/>
+          </a:p>
+        </p:txBody>
       </p:sp>
       <p:sp>
         <p:nvSpPr>
@@ -1684,7 +1768,7 @@
               <a:rPr lang="en-US"/>
               <a:t>10</a:t>
             </a:fld>
-            <a:endParaRPr lang="en-US"/>
+            <a:endParaRPr lang="en-US" dirty="0"/>
           </a:p>
         </p:txBody>
       </p:sp>
@@ -1850,7 +1934,7 @@
               <a:rPr lang="en-GB" smtClean="0"/>
               <a:t>16/03/2026</a:t>
             </a:fld>
-            <a:endParaRPr lang="en-GB"/>
+            <a:endParaRPr lang="en-GB" dirty="0"/>
           </a:p>
         </p:txBody>
       </p:sp>
@@ -1875,7 +1959,7 @@
           <a:bodyPr/>
           <a:lstStyle/>
           <a:p>
-            <a:endParaRPr lang="en-GB"/>
+            <a:endParaRPr lang="en-GB" dirty="0"/>
           </a:p>
         </p:txBody>
       </p:sp>
@@ -1904,7 +1988,7 @@
               <a:rPr lang="en-GB" smtClean="0"/>
               <a:t>‹#›</a:t>
             </a:fld>
-            <a:endParaRPr lang="en-GB"/>
+            <a:endParaRPr lang="en-GB" dirty="0"/>
           </a:p>
         </p:txBody>
       </p:sp>
@@ -2048,7 +2132,7 @@
               <a:rPr lang="en-GB" smtClean="0"/>
               <a:t>16/03/2026</a:t>
             </a:fld>
-            <a:endParaRPr lang="en-GB"/>
+            <a:endParaRPr lang="en-GB" dirty="0"/>
           </a:p>
         </p:txBody>
       </p:sp>
@@ -2073,7 +2157,7 @@
           <a:bodyPr/>
           <a:lstStyle/>
           <a:p>
-            <a:endParaRPr lang="en-GB"/>
+            <a:endParaRPr lang="en-GB" dirty="0"/>
           </a:p>
         </p:txBody>
       </p:sp>
@@ -2102,7 +2186,7 @@
               <a:rPr lang="en-GB" smtClean="0"/>
               <a:t>‹#›</a:t>
             </a:fld>
-            <a:endParaRPr lang="en-GB"/>
+            <a:endParaRPr lang="en-GB" dirty="0"/>
           </a:p>
         </p:txBody>
       </p:sp>
@@ -2256,7 +2340,7 @@
               <a:rPr lang="en-GB" smtClean="0"/>
               <a:t>16/03/2026</a:t>
             </a:fld>
-            <a:endParaRPr lang="en-GB"/>
+            <a:endParaRPr lang="en-GB" dirty="0"/>
           </a:p>
         </p:txBody>
       </p:sp>
@@ -2281,7 +2365,7 @@
           <a:bodyPr/>
           <a:lstStyle/>
           <a:p>
-            <a:endParaRPr lang="en-GB"/>
+            <a:endParaRPr lang="en-GB" dirty="0"/>
           </a:p>
         </p:txBody>
       </p:sp>
@@ -2310,7 +2394,7 @@
               <a:rPr lang="en-GB" smtClean="0"/>
               <a:t>‹#›</a:t>
             </a:fld>
-            <a:endParaRPr lang="en-GB"/>
+            <a:endParaRPr lang="en-GB" dirty="0"/>
           </a:p>
         </p:txBody>
       </p:sp>
@@ -2489,7 +2573,7 @@
               <a:rPr lang="en-GB" smtClean="0"/>
               <a:t>16/03/2026</a:t>
             </a:fld>
-            <a:endParaRPr lang="en-GB"/>
+            <a:endParaRPr lang="en-GB" dirty="0"/>
           </a:p>
         </p:txBody>
       </p:sp>
@@ -2514,7 +2598,7 @@
           <a:bodyPr/>
           <a:lstStyle/>
           <a:p>
-            <a:endParaRPr lang="en-GB"/>
+            <a:endParaRPr lang="en-GB" dirty="0"/>
           </a:p>
         </p:txBody>
       </p:sp>
@@ -2543,7 +2627,7 @@
               <a:rPr lang="en-GB" smtClean="0"/>
               <a:t>‹#›</a:t>
             </a:fld>
-            <a:endParaRPr lang="en-GB"/>
+            <a:endParaRPr lang="en-GB" dirty="0"/>
           </a:p>
         </p:txBody>
       </p:sp>
@@ -2764,7 +2848,7 @@
               <a:rPr lang="en-GB" smtClean="0"/>
               <a:t>16/03/2026</a:t>
             </a:fld>
-            <a:endParaRPr lang="en-GB"/>
+            <a:endParaRPr lang="en-GB" dirty="0"/>
           </a:p>
         </p:txBody>
       </p:sp>
@@ -2789,7 +2873,7 @@
           <a:bodyPr/>
           <a:lstStyle/>
           <a:p>
-            <a:endParaRPr lang="en-GB"/>
+            <a:endParaRPr lang="en-GB" dirty="0"/>
           </a:p>
         </p:txBody>
       </p:sp>
@@ -2818,7 +2902,7 @@
               <a:rPr lang="en-GB" smtClean="0"/>
               <a:t>‹#›</a:t>
             </a:fld>
-            <a:endParaRPr lang="en-GB"/>
+            <a:endParaRPr lang="en-GB" dirty="0"/>
           </a:p>
         </p:txBody>
       </p:sp>
@@ -3029,7 +3113,7 @@
               <a:rPr lang="en-GB" smtClean="0"/>
               <a:t>16/03/2026</a:t>
             </a:fld>
-            <a:endParaRPr lang="en-GB"/>
+            <a:endParaRPr lang="en-GB" dirty="0"/>
           </a:p>
         </p:txBody>
       </p:sp>
@@ -3054,7 +3138,7 @@
           <a:bodyPr/>
           <a:lstStyle/>
           <a:p>
-            <a:endParaRPr lang="en-GB"/>
+            <a:endParaRPr lang="en-GB" dirty="0"/>
           </a:p>
         </p:txBody>
       </p:sp>
@@ -3083,7 +3167,7 @@
               <a:rPr lang="en-GB" smtClean="0"/>
               <a:t>‹#›</a:t>
             </a:fld>
-            <a:endParaRPr lang="en-GB"/>
+            <a:endParaRPr lang="en-GB" dirty="0"/>
           </a:p>
         </p:txBody>
       </p:sp>
@@ -3441,7 +3525,7 @@
               <a:rPr lang="en-GB" smtClean="0"/>
               <a:t>16/03/2026</a:t>
             </a:fld>
-            <a:endParaRPr lang="en-GB"/>
+            <a:endParaRPr lang="en-GB" dirty="0"/>
           </a:p>
         </p:txBody>
       </p:sp>
@@ -3466,7 +3550,7 @@
           <a:bodyPr/>
           <a:lstStyle/>
           <a:p>
-            <a:endParaRPr lang="en-GB"/>
+            <a:endParaRPr lang="en-GB" dirty="0"/>
           </a:p>
         </p:txBody>
       </p:sp>
@@ -3495,7 +3579,7 @@
               <a:rPr lang="en-GB" smtClean="0"/>
               <a:t>‹#›</a:t>
             </a:fld>
-            <a:endParaRPr lang="en-GB"/>
+            <a:endParaRPr lang="en-GB" dirty="0"/>
           </a:p>
         </p:txBody>
       </p:sp>
@@ -3582,7 +3666,7 @@
               <a:rPr lang="en-GB" smtClean="0"/>
               <a:t>16/03/2026</a:t>
             </a:fld>
-            <a:endParaRPr lang="en-GB"/>
+            <a:endParaRPr lang="en-GB" dirty="0"/>
           </a:p>
         </p:txBody>
       </p:sp>
@@ -3607,7 +3691,7 @@
           <a:bodyPr/>
           <a:lstStyle/>
           <a:p>
-            <a:endParaRPr lang="en-GB"/>
+            <a:endParaRPr lang="en-GB" dirty="0"/>
           </a:p>
         </p:txBody>
       </p:sp>
@@ -3636,7 +3720,7 @@
               <a:rPr lang="en-GB" smtClean="0"/>
               <a:t>‹#›</a:t>
             </a:fld>
-            <a:endParaRPr lang="en-GB"/>
+            <a:endParaRPr lang="en-GB" dirty="0"/>
           </a:p>
         </p:txBody>
       </p:sp>
@@ -3695,7 +3779,7 @@
               <a:rPr lang="en-GB" smtClean="0"/>
               <a:t>16/03/2026</a:t>
             </a:fld>
-            <a:endParaRPr lang="en-GB"/>
+            <a:endParaRPr lang="en-GB" dirty="0"/>
           </a:p>
         </p:txBody>
       </p:sp>
@@ -3720,7 +3804,7 @@
           <a:bodyPr/>
           <a:lstStyle/>
           <a:p>
-            <a:endParaRPr lang="en-GB"/>
+            <a:endParaRPr lang="en-GB" dirty="0"/>
           </a:p>
         </p:txBody>
       </p:sp>
@@ -3749,7 +3833,7 @@
               <a:rPr lang="en-GB" smtClean="0"/>
               <a:t>‹#›</a:t>
             </a:fld>
-            <a:endParaRPr lang="en-GB"/>
+            <a:endParaRPr lang="en-GB" dirty="0"/>
           </a:p>
         </p:txBody>
       </p:sp>
@@ -4006,7 +4090,7 @@
               <a:rPr lang="en-GB" smtClean="0"/>
               <a:t>16/03/2026</a:t>
             </a:fld>
-            <a:endParaRPr lang="en-GB"/>
+            <a:endParaRPr lang="en-GB" dirty="0"/>
           </a:p>
         </p:txBody>
       </p:sp>
@@ -4031,7 +4115,7 @@
           <a:bodyPr/>
           <a:lstStyle/>
           <a:p>
-            <a:endParaRPr lang="en-GB"/>
+            <a:endParaRPr lang="en-GB" dirty="0"/>
           </a:p>
         </p:txBody>
       </p:sp>
@@ -4060,7 +4144,7 @@
               <a:rPr lang="en-GB" smtClean="0"/>
               <a:t>‹#›</a:t>
             </a:fld>
-            <a:endParaRPr lang="en-GB"/>
+            <a:endParaRPr lang="en-GB" dirty="0"/>
           </a:p>
         </p:txBody>
       </p:sp>
@@ -4194,7 +4278,7 @@
             </a:lvl9pPr>
           </a:lstStyle>
           <a:p>
-            <a:endParaRPr lang="en-GB"/>
+            <a:endParaRPr lang="en-GB" dirty="0"/>
           </a:p>
         </p:txBody>
       </p:sp>
@@ -4294,7 +4378,7 @@
               <a:rPr lang="en-GB" smtClean="0"/>
               <a:t>16/03/2026</a:t>
             </a:fld>
-            <a:endParaRPr lang="en-GB"/>
+            <a:endParaRPr lang="en-GB" dirty="0"/>
           </a:p>
         </p:txBody>
       </p:sp>
@@ -4319,7 +4403,7 @@
           <a:bodyPr/>
           <a:lstStyle/>
           <a:p>
-            <a:endParaRPr lang="en-GB"/>
+            <a:endParaRPr lang="en-GB" dirty="0"/>
           </a:p>
         </p:txBody>
       </p:sp>
@@ -4348,7 +4432,7 @@
               <a:rPr lang="en-GB" smtClean="0"/>
               <a:t>‹#›</a:t>
             </a:fld>
-            <a:endParaRPr lang="en-GB"/>
+            <a:endParaRPr lang="en-GB" dirty="0"/>
           </a:p>
         </p:txBody>
       </p:sp>
@@ -4535,7 +4619,7 @@
               <a:rPr lang="en-GB" smtClean="0"/>
               <a:t>16/03/2026</a:t>
             </a:fld>
-            <a:endParaRPr lang="en-GB"/>
+            <a:endParaRPr lang="en-GB" dirty="0"/>
           </a:p>
         </p:txBody>
       </p:sp>
@@ -4578,7 +4662,7 @@
             </a:lvl1pPr>
           </a:lstStyle>
           <a:p>
-            <a:endParaRPr lang="en-GB"/>
+            <a:endParaRPr lang="en-GB" dirty="0"/>
           </a:p>
         </p:txBody>
       </p:sp>
@@ -4625,7 +4709,7 @@
               <a:rPr lang="en-GB" smtClean="0"/>
               <a:t>‹#›</a:t>
             </a:fld>
-            <a:endParaRPr lang="en-GB"/>
+            <a:endParaRPr lang="en-GB" dirty="0"/>
           </a:p>
         </p:txBody>
       </p:sp>
@@ -5017,7 +5101,7 @@
           <a:bodyPr/>
           <a:lstStyle/>
           <a:p>
-            <a:endParaRPr lang="en-US"/>
+            <a:endParaRPr lang="en-US" dirty="0"/>
           </a:p>
         </p:txBody>
       </p:sp>
@@ -5048,7 +5132,7 @@
           <a:bodyPr/>
           <a:lstStyle/>
           <a:p>
-            <a:endParaRPr lang="en-GB"/>
+            <a:endParaRPr lang="en-GB" dirty="0"/>
           </a:p>
         </p:txBody>
       </p:sp>
@@ -5184,7 +5268,7 @@
           <a:bodyPr/>
           <a:lstStyle/>
           <a:p>
-            <a:endParaRPr lang="en-GB"/>
+            <a:endParaRPr lang="en-GB" dirty="0"/>
           </a:p>
         </p:txBody>
       </p:sp>
@@ -5249,7 +5333,7 @@
           <a:bodyPr/>
           <a:lstStyle/>
           <a:p>
-            <a:endParaRPr lang="en-GB"/>
+            <a:endParaRPr lang="en-GB" dirty="0"/>
           </a:p>
         </p:txBody>
       </p:sp>
@@ -5278,7 +5362,7 @@
           <a:bodyPr/>
           <a:lstStyle/>
           <a:p>
-            <a:endParaRPr lang="en-GB"/>
+            <a:endParaRPr lang="en-GB" dirty="0"/>
           </a:p>
         </p:txBody>
       </p:sp>
@@ -5307,7 +5391,7 @@
           <a:bodyPr/>
           <a:lstStyle/>
           <a:p>
-            <a:endParaRPr lang="en-GB"/>
+            <a:endParaRPr lang="en-GB" dirty="0"/>
           </a:p>
         </p:txBody>
       </p:sp>
@@ -5346,7 +5430,7 @@
           <a:p>
             <a:pPr algn="ctr"/>
             <a:r>
-              <a:rPr lang="en-GB" sz="900" b="1">
+              <a:rPr lang="en-GB" sz="900" b="1" dirty="0">
                 <a:solidFill>
                   <a:srgbClr val="FFFFFF"/>
                 </a:solidFill>
@@ -5354,12 +5438,6 @@
               </a:rPr>
               <a:t>THE WORKFLOW</a:t>
             </a:r>
-            <a:endParaRPr lang="en-GB" sz="900" b="1" dirty="0">
-              <a:solidFill>
-                <a:srgbClr val="FFFFFF"/>
-              </a:solidFill>
-              <a:latin typeface="Source Sans Pro"/>
-            </a:endParaRPr>
           </a:p>
         </p:txBody>
       </p:sp>
@@ -5426,7 +5504,7 @@
           <a:bodyPr/>
           <a:lstStyle/>
           <a:p>
-            <a:endParaRPr lang="en-GB"/>
+            <a:endParaRPr lang="en-GB" dirty="0"/>
           </a:p>
         </p:txBody>
       </p:sp>
@@ -5500,7 +5578,7 @@
           <a:bodyPr/>
           <a:lstStyle/>
           <a:p>
-            <a:endParaRPr lang="en-GB"/>
+            <a:endParaRPr lang="en-GB" dirty="0"/>
           </a:p>
         </p:txBody>
       </p:sp>
@@ -5587,7 +5665,7 @@
           <a:bodyPr/>
           <a:lstStyle/>
           <a:p>
-            <a:endParaRPr lang="en-GB"/>
+            <a:endParaRPr lang="en-GB" dirty="0"/>
           </a:p>
         </p:txBody>
       </p:sp>
@@ -5706,7 +5784,7 @@
           <a:bodyPr/>
           <a:lstStyle/>
           <a:p>
-            <a:endParaRPr lang="en-GB"/>
+            <a:endParaRPr lang="en-GB" dirty="0"/>
           </a:p>
         </p:txBody>
       </p:sp>
@@ -5739,7 +5817,7 @@
           <a:bodyPr/>
           <a:lstStyle/>
           <a:p>
-            <a:endParaRPr lang="en-GB"/>
+            <a:endParaRPr lang="en-GB" dirty="0"/>
           </a:p>
         </p:txBody>
       </p:sp>
@@ -5828,7 +5906,7 @@
                 </a:solidFill>
                 <a:latin typeface="Source Sans Pro"/>
               </a:rPr>
-              <a:t>Found something worth sharing? Pin it. Add your own commentary, title it, and build a sequence that tells a clear story.</a:t>
+              <a:t>Found something worth sharing? Pin it. Add your own commentary, title it, and build a sequence that tells a clear story. Insert image slides between your pins — qual findings, visuals, or slides from other reports — so the full story sits in one place.</a:t>
             </a:r>
           </a:p>
         </p:txBody>
@@ -5858,7 +5936,7 @@
           <a:bodyPr/>
           <a:lstStyle/>
           <a:p>
-            <a:endParaRPr lang="en-GB"/>
+            <a:endParaRPr lang="en-GB" dirty="0"/>
           </a:p>
         </p:txBody>
       </p:sp>
@@ -5891,7 +5969,7 @@
           <a:bodyPr/>
           <a:lstStyle/>
           <a:p>
-            <a:endParaRPr lang="en-GB"/>
+            <a:endParaRPr lang="en-GB" dirty="0"/>
           </a:p>
         </p:txBody>
       </p:sp>
@@ -6098,7 +6176,7 @@
           <a:bodyPr/>
           <a:lstStyle/>
           <a:p>
-            <a:endParaRPr lang="en-GB"/>
+            <a:endParaRPr lang="en-GB" dirty="0"/>
           </a:p>
         </p:txBody>
       </p:sp>
@@ -6127,7 +6205,7 @@
           <a:bodyPr/>
           <a:lstStyle/>
           <a:p>
-            <a:endParaRPr lang="en-GB"/>
+            <a:endParaRPr lang="en-GB" dirty="0"/>
           </a:p>
         </p:txBody>
       </p:sp>
@@ -6156,7 +6234,7 @@
           <a:bodyPr/>
           <a:lstStyle/>
           <a:p>
-            <a:endParaRPr lang="en-GB"/>
+            <a:endParaRPr lang="en-GB" dirty="0"/>
           </a:p>
         </p:txBody>
       </p:sp>
@@ -6195,7 +6273,7 @@
           <a:p>
             <a:pPr algn="ctr"/>
             <a:r>
-              <a:rPr lang="en-GB" sz="900" b="1">
+              <a:rPr lang="en-GB" sz="900" b="1" dirty="0">
                 <a:solidFill>
                   <a:srgbClr val="FFFFFF"/>
                 </a:solidFill>
@@ -6203,12 +6281,6 @@
               </a:rPr>
               <a:t>THE PLATFORM</a:t>
             </a:r>
-            <a:endParaRPr lang="en-GB" sz="900" b="1" dirty="0">
-              <a:solidFill>
-                <a:srgbClr val="FFFFFF"/>
-              </a:solidFill>
-              <a:latin typeface="Source Sans Pro"/>
-            </a:endParaRPr>
           </a:p>
         </p:txBody>
       </p:sp>
@@ -6320,7 +6392,7 @@
           <a:bodyPr/>
           <a:lstStyle/>
           <a:p>
-            <a:endParaRPr lang="en-GB"/>
+            <a:endParaRPr lang="en-GB" dirty="0"/>
           </a:p>
         </p:txBody>
       </p:sp>
@@ -6355,7 +6427,7 @@
                 </a:solidFill>
                 <a:latin typeface="Source Sans Pro"/>
               </a:rPr>
-              <a:t>Specialist analytical modules, all delivered within the same interactive report.</a:t>
+              <a:t>Specialist analytical modules, all delivered within the same interactive report</a:t>
             </a:r>
           </a:p>
         </p:txBody>
@@ -6389,7 +6461,7 @@
           <a:bodyPr/>
           <a:lstStyle/>
           <a:p>
-            <a:endParaRPr lang="en-GB"/>
+            <a:endParaRPr lang="en-GB" dirty="0"/>
           </a:p>
         </p:txBody>
       </p:sp>
@@ -6474,7 +6546,7 @@
           <a:bodyPr/>
           <a:lstStyle/>
           <a:p>
-            <a:endParaRPr lang="en-GB"/>
+            <a:endParaRPr lang="en-GB" dirty="0"/>
           </a:p>
         </p:txBody>
       </p:sp>
@@ -6559,7 +6631,7 @@
           <a:bodyPr/>
           <a:lstStyle/>
           <a:p>
-            <a:endParaRPr lang="en-GB"/>
+            <a:endParaRPr lang="en-GB" dirty="0"/>
           </a:p>
         </p:txBody>
       </p:sp>
@@ -6644,7 +6716,7 @@
           <a:bodyPr/>
           <a:lstStyle/>
           <a:p>
-            <a:endParaRPr lang="en-GB"/>
+            <a:endParaRPr lang="en-GB" dirty="0"/>
           </a:p>
         </p:txBody>
       </p:sp>
@@ -6729,7 +6801,7 @@
           <a:bodyPr/>
           <a:lstStyle/>
           <a:p>
-            <a:endParaRPr lang="en-GB"/>
+            <a:endParaRPr lang="en-GB" dirty="0"/>
           </a:p>
         </p:txBody>
       </p:sp>
@@ -6814,7 +6886,7 @@
           <a:bodyPr/>
           <a:lstStyle/>
           <a:p>
-            <a:endParaRPr lang="en-GB"/>
+            <a:endParaRPr lang="en-GB" dirty="0"/>
           </a:p>
         </p:txBody>
       </p:sp>
@@ -6899,7 +6971,7 @@
           <a:bodyPr/>
           <a:lstStyle/>
           <a:p>
-            <a:endParaRPr lang="en-GB"/>
+            <a:endParaRPr lang="en-GB" dirty="0"/>
           </a:p>
         </p:txBody>
       </p:sp>
@@ -6984,7 +7056,7 @@
           <a:bodyPr/>
           <a:lstStyle/>
           <a:p>
-            <a:endParaRPr lang="en-GB"/>
+            <a:endParaRPr lang="en-GB" dirty="0"/>
           </a:p>
         </p:txBody>
       </p:sp>
@@ -7035,7 +7107,7 @@
                 </a:solidFill>
                 <a:latin typeface="Source Sans Pro"/>
               </a:rPr>
-              <a:t>Van Westendorp and Gabor-Granger models</a:t>
+              <a:t>Van Westendorp, Gabor-Granger and monadic  models</a:t>
             </a:r>
           </a:p>
         </p:txBody>
@@ -7069,7 +7141,7 @@
           <a:bodyPr/>
           <a:lstStyle/>
           <a:p>
-            <a:endParaRPr lang="en-GB"/>
+            <a:endParaRPr lang="en-GB" dirty="0"/>
           </a:p>
         </p:txBody>
       </p:sp>
@@ -7154,7 +7226,7 @@
           <a:bodyPr/>
           <a:lstStyle/>
           <a:p>
-            <a:endParaRPr lang="en-GB"/>
+            <a:endParaRPr lang="en-GB" dirty="0"/>
           </a:p>
         </p:txBody>
       </p:sp>
@@ -7245,7 +7317,7 @@
                 </a:solidFill>
                 <a:latin typeface="Source Sans Pro"/>
               </a:rPr>
-              <a:t>Multiple modules can be combined into a single report.</a:t>
+              <a:t>Multiple modules can be combined into a single report</a:t>
             </a:r>
           </a:p>
         </p:txBody>
@@ -7275,14 +7347,14 @@
           <a:bodyPr/>
           <a:lstStyle/>
           <a:p>
-            <a:endParaRPr lang="en-GB"/>
+            <a:endParaRPr lang="en-GB" dirty="0"/>
           </a:p>
         </p:txBody>
       </p:sp>
     </p:spTree>
     <p:extLst>
       <p:ext uri="{BB962C8B-B14F-4D97-AF65-F5344CB8AC3E}">
-        <p14:creationId xmlns:p14="http://schemas.microsoft.com/office/powerpoint/2010/main" val="1206420836"/>
+        <p14:creationId xmlns:p14="http://schemas.microsoft.com/office/powerpoint/2010/main" val="3143627676"/>
       </p:ext>
     </p:extLst>
   </p:cSld>
@@ -7340,7 +7412,7 @@
           <a:bodyPr/>
           <a:lstStyle/>
           <a:p>
-            <a:endParaRPr lang="en-GB"/>
+            <a:endParaRPr lang="en-GB" dirty="0"/>
           </a:p>
         </p:txBody>
       </p:sp>
@@ -7369,7 +7441,7 @@
           <a:bodyPr/>
           <a:lstStyle/>
           <a:p>
-            <a:endParaRPr lang="en-GB"/>
+            <a:endParaRPr lang="en-GB" dirty="0"/>
           </a:p>
         </p:txBody>
       </p:sp>
@@ -7398,7 +7470,7 @@
           <a:bodyPr/>
           <a:lstStyle/>
           <a:p>
-            <a:endParaRPr lang="en-GB"/>
+            <a:endParaRPr lang="en-GB" dirty="0"/>
           </a:p>
         </p:txBody>
       </p:sp>
@@ -7437,7 +7509,7 @@
           <a:p>
             <a:pPr algn="ctr"/>
             <a:r>
-              <a:rPr lang="en-GB" sz="900" b="1">
+              <a:rPr lang="en-GB" sz="900" b="1" dirty="0">
                 <a:solidFill>
                   <a:srgbClr val="FFFFFF"/>
                 </a:solidFill>
@@ -7445,12 +7517,6 @@
               </a:rPr>
               <a:t>WORKING TOGETHER</a:t>
             </a:r>
-            <a:endParaRPr lang="en-GB" sz="900" b="1" dirty="0">
-              <a:solidFill>
-                <a:srgbClr val="FFFFFF"/>
-              </a:solidFill>
-              <a:latin typeface="Source Sans Pro"/>
-            </a:endParaRPr>
           </a:p>
         </p:txBody>
       </p:sp>
@@ -7562,7 +7628,7 @@
           <a:bodyPr/>
           <a:lstStyle/>
           <a:p>
-            <a:endParaRPr lang="en-GB"/>
+            <a:endParaRPr lang="en-GB" dirty="0"/>
           </a:p>
         </p:txBody>
       </p:sp>
@@ -7591,7 +7657,7 @@
           <a:bodyPr/>
           <a:lstStyle/>
           <a:p>
-            <a:endParaRPr lang="en-GB"/>
+            <a:endParaRPr lang="en-GB" dirty="0"/>
           </a:p>
         </p:txBody>
       </p:sp>
@@ -7624,7 +7690,7 @@
           <a:bodyPr/>
           <a:lstStyle/>
           <a:p>
-            <a:endParaRPr lang="en-GB"/>
+            <a:endParaRPr lang="en-GB" dirty="0"/>
           </a:p>
         </p:txBody>
       </p:sp>
@@ -7691,7 +7757,7 @@
                 </a:solidFill>
                 <a:latin typeface="Source Sans Pro"/>
               </a:rPr>
-              <a:t>Structuring questions to produce clean, analysable data.</a:t>
+              <a:t>Structuring questions to produce clean, analysable data</a:t>
             </a:r>
           </a:p>
         </p:txBody>
@@ -7725,7 +7791,7 @@
           <a:bodyPr/>
           <a:lstStyle/>
           <a:p>
-            <a:endParaRPr lang="en-GB"/>
+            <a:endParaRPr lang="en-GB" dirty="0"/>
           </a:p>
         </p:txBody>
       </p:sp>
@@ -7792,7 +7858,7 @@
                 </a:solidFill>
                 <a:latin typeface="Source Sans Pro"/>
               </a:rPr>
-              <a:t>Choosing the right methods and structuring the approach.</a:t>
+              <a:t>Choosing the right methods and structuring the approach</a:t>
             </a:r>
           </a:p>
         </p:txBody>
@@ -7826,7 +7892,7 @@
           <a:bodyPr/>
           <a:lstStyle/>
           <a:p>
-            <a:endParaRPr lang="en-GB"/>
+            <a:endParaRPr lang="en-GB" dirty="0"/>
           </a:p>
         </p:txBody>
       </p:sp>
@@ -7893,7 +7959,7 @@
                 </a:solidFill>
                 <a:latin typeface="Source Sans Pro"/>
               </a:rPr>
-              <a:t>Cleaning, coding, and preparing data for rigorous analysis.</a:t>
+              <a:t>Cleaning, coding, and preparing data for rigorous analysis</a:t>
             </a:r>
           </a:p>
         </p:txBody>
@@ -7927,7 +7993,7 @@
           <a:bodyPr/>
           <a:lstStyle/>
           <a:p>
-            <a:endParaRPr lang="en-GB"/>
+            <a:endParaRPr lang="en-GB" dirty="0"/>
           </a:p>
         </p:txBody>
       </p:sp>
@@ -7994,7 +8060,7 @@
                 </a:solidFill>
                 <a:latin typeface="Source Sans Pro"/>
               </a:rPr>
-              <a:t>Making sense of results and building a clear narrative.</a:t>
+              <a:t>Making sense of results and building a clear narrative</a:t>
             </a:r>
           </a:p>
         </p:txBody>
@@ -8028,7 +8094,7 @@
           <a:bodyPr/>
           <a:lstStyle/>
           <a:p>
-            <a:endParaRPr lang="en-GB"/>
+            <a:endParaRPr lang="en-GB" dirty="0"/>
           </a:p>
         </p:txBody>
       </p:sp>
@@ -8095,7 +8161,7 @@
                 </a:solidFill>
                 <a:latin typeface="Source Sans Pro"/>
               </a:rPr>
-              <a:t>We can evaluate and prepare existing datasets for analysis, regardless of source.</a:t>
+              <a:t>We can evaluate and prepare existing datasets for analysis, regardless of source</a:t>
             </a:r>
           </a:p>
         </p:txBody>
@@ -8135,7 +8201,7 @@
                 </a:solidFill>
                 <a:latin typeface="Source Sans Pro"/>
               </a:rPr>
-              <a:t>For most projects we also prepare an initial set of pinned views, giving your team a ready-made starting point.</a:t>
+              <a:t>For most projects we also prepare an initial set of pinned views, giving your team a ready-made starting point</a:t>
             </a:r>
           </a:p>
         </p:txBody>
@@ -8143,7 +8209,7 @@
     </p:spTree>
     <p:extLst>
       <p:ext uri="{BB962C8B-B14F-4D97-AF65-F5344CB8AC3E}">
-        <p14:creationId xmlns:p14="http://schemas.microsoft.com/office/powerpoint/2010/main" val="1591960344"/>
+        <p14:creationId xmlns:p14="http://schemas.microsoft.com/office/powerpoint/2010/main" val="971244840"/>
       </p:ext>
     </p:extLst>
   </p:cSld>
@@ -8201,7 +8267,7 @@
           <a:bodyPr/>
           <a:lstStyle/>
           <a:p>
-            <a:endParaRPr lang="en-GB"/>
+            <a:endParaRPr lang="en-GB" dirty="0"/>
           </a:p>
         </p:txBody>
       </p:sp>
@@ -8230,7 +8296,7 @@
           <a:bodyPr/>
           <a:lstStyle/>
           <a:p>
-            <a:endParaRPr lang="en-GB"/>
+            <a:endParaRPr lang="en-GB" dirty="0"/>
           </a:p>
         </p:txBody>
       </p:sp>
@@ -8259,7 +8325,7 @@
           <a:bodyPr/>
           <a:lstStyle/>
           <a:p>
-            <a:endParaRPr lang="en-GB"/>
+            <a:endParaRPr lang="en-GB" dirty="0"/>
           </a:p>
         </p:txBody>
       </p:sp>
@@ -8298,7 +8364,7 @@
           <a:p>
             <a:pPr algn="ctr"/>
             <a:r>
-              <a:rPr lang="en-GB" sz="900" b="1">
+              <a:rPr lang="en-GB" sz="900" b="1" dirty="0">
                 <a:solidFill>
                   <a:srgbClr val="FFFFFF"/>
                 </a:solidFill>
@@ -8306,12 +8372,6 @@
               </a:rPr>
               <a:t>NEXT STEPS</a:t>
             </a:r>
-            <a:endParaRPr lang="en-GB" sz="900" b="1" dirty="0">
-              <a:solidFill>
-                <a:srgbClr val="FFFFFF"/>
-              </a:solidFill>
-              <a:latin typeface="Source Sans Pro"/>
-            </a:endParaRPr>
           </a:p>
         </p:txBody>
       </p:sp>
@@ -8423,7 +8483,7 @@
           <a:bodyPr/>
           <a:lstStyle/>
           <a:p>
-            <a:endParaRPr lang="en-GB"/>
+            <a:endParaRPr lang="en-GB" dirty="0"/>
           </a:p>
         </p:txBody>
       </p:sp>
@@ -8550,7 +8610,7 @@
           <a:bodyPr/>
           <a:lstStyle/>
           <a:p>
-            <a:endParaRPr lang="en-GB"/>
+            <a:endParaRPr lang="en-GB" dirty="0"/>
           </a:p>
         </p:txBody>
       </p:sp>
@@ -8609,7 +8669,7 @@
           <a:bodyPr/>
           <a:lstStyle/>
           <a:p>
-            <a:endParaRPr lang="en-GB"/>
+            <a:endParaRPr lang="en-GB" dirty="0"/>
           </a:p>
         </p:txBody>
       </p:sp>
@@ -8638,7 +8698,7 @@
           <a:bodyPr/>
           <a:lstStyle/>
           <a:p>
-            <a:endParaRPr lang="en-GB"/>
+            <a:endParaRPr lang="en-GB" dirty="0"/>
           </a:p>
         </p:txBody>
       </p:sp>
@@ -8667,7 +8727,7 @@
           <a:bodyPr/>
           <a:lstStyle/>
           <a:p>
-            <a:endParaRPr lang="en-GB"/>
+            <a:endParaRPr lang="en-GB" dirty="0"/>
           </a:p>
         </p:txBody>
       </p:sp>
@@ -8704,15 +8764,6 @@
               </a:rPr>
               <a:t>Turas</a:t>
             </a:r>
-            <a:r>
-              <a:rPr lang="en-GB" sz="4800" dirty="0">
-                <a:solidFill>
-                  <a:srgbClr val="CC9900"/>
-                </a:solidFill>
-                <a:latin typeface="Raleway"/>
-              </a:rPr>
-              <a:t>.</a:t>
-            </a:r>
           </a:p>
         </p:txBody>
       </p:sp>
@@ -8747,7 +8798,7 @@
                 </a:solidFill>
                 <a:latin typeface="Source Sans Pro"/>
               </a:rPr>
-              <a:t>Complete analytics. No strings attached.</a:t>
+              <a:t>Complete analytics. No strings attached</a:t>
             </a:r>
           </a:p>
         </p:txBody>
@@ -8777,7 +8828,7 @@
           <a:bodyPr/>
           <a:lstStyle/>
           <a:p>
-            <a:endParaRPr lang="en-GB"/>
+            <a:endParaRPr lang="en-GB" dirty="0"/>
           </a:p>
         </p:txBody>
       </p:sp>
@@ -8810,7 +8861,7 @@
               </a:lnSpc>
             </a:pPr>
             <a:r>
-              <a:rPr lang="en-GB" sz="1400" dirty="0" err="1">
+              <a:rPr lang="en-GB" sz="1400" dirty="0">
                 <a:solidFill>
                   <a:srgbClr val="CC9900"/>
                 </a:solidFill>
@@ -8888,7 +8939,7 @@
           <a:bodyPr/>
           <a:lstStyle/>
           <a:p>
-            <a:endParaRPr lang="en-GB"/>
+            <a:endParaRPr lang="en-GB" dirty="0"/>
           </a:p>
         </p:txBody>
       </p:sp>
@@ -8917,14 +8968,14 @@
           <a:bodyPr/>
           <a:lstStyle/>
           <a:p>
-            <a:endParaRPr lang="en-GB"/>
+            <a:endParaRPr lang="en-GB" dirty="0"/>
           </a:p>
         </p:txBody>
       </p:sp>
     </p:spTree>
     <p:extLst>
       <p:ext uri="{BB962C8B-B14F-4D97-AF65-F5344CB8AC3E}">
-        <p14:creationId xmlns:p14="http://schemas.microsoft.com/office/powerpoint/2010/main" val="3103481509"/>
+        <p14:creationId xmlns:p14="http://schemas.microsoft.com/office/powerpoint/2010/main" val="1412857935"/>
       </p:ext>
     </p:extLst>
   </p:cSld>
@@ -8986,7 +9037,7 @@
           <a:bodyPr/>
           <a:lstStyle/>
           <a:p>
-            <a:endParaRPr lang="en-GB"/>
+            <a:endParaRPr lang="en-GB" dirty="0"/>
           </a:p>
         </p:txBody>
       </p:sp>
@@ -9015,7 +9066,7 @@
           <a:bodyPr/>
           <a:lstStyle/>
           <a:p>
-            <a:endParaRPr lang="en-GB"/>
+            <a:endParaRPr lang="en-GB" dirty="0"/>
           </a:p>
         </p:txBody>
       </p:sp>
@@ -9044,7 +9095,7 @@
           <a:bodyPr/>
           <a:lstStyle/>
           <a:p>
-            <a:endParaRPr lang="en-GB"/>
+            <a:endParaRPr lang="en-GB" dirty="0"/>
           </a:p>
         </p:txBody>
       </p:sp>
@@ -9200,7 +9251,7 @@
           <a:bodyPr/>
           <a:lstStyle/>
           <a:p>
-            <a:endParaRPr lang="en-GB"/>
+            <a:endParaRPr lang="en-GB" dirty="0"/>
           </a:p>
         </p:txBody>
       </p:sp>
@@ -9233,7 +9284,7 @@
           <a:bodyPr/>
           <a:lstStyle/>
           <a:p>
-            <a:endParaRPr lang="en-GB"/>
+            <a:endParaRPr lang="en-GB" dirty="0"/>
           </a:p>
         </p:txBody>
       </p:sp>
@@ -9264,7 +9315,7 @@
           <a:bodyPr/>
           <a:lstStyle/>
           <a:p>
-            <a:endParaRPr lang="en-GB"/>
+            <a:endParaRPr lang="en-GB" dirty="0"/>
           </a:p>
         </p:txBody>
       </p:sp>
@@ -9349,7 +9400,7 @@
           <a:bodyPr/>
           <a:lstStyle/>
           <a:p>
-            <a:endParaRPr lang="en-GB"/>
+            <a:endParaRPr lang="en-GB" dirty="0"/>
           </a:p>
         </p:txBody>
       </p:sp>
@@ -9380,7 +9431,7 @@
           <a:bodyPr/>
           <a:lstStyle/>
           <a:p>
-            <a:endParaRPr lang="en-GB"/>
+            <a:endParaRPr lang="en-GB" dirty="0"/>
           </a:p>
         </p:txBody>
       </p:sp>
@@ -9465,7 +9516,7 @@
           <a:bodyPr/>
           <a:lstStyle/>
           <a:p>
-            <a:endParaRPr lang="en-GB"/>
+            <a:endParaRPr lang="en-GB" dirty="0"/>
           </a:p>
         </p:txBody>
       </p:sp>
@@ -9496,7 +9547,7 @@
           <a:bodyPr/>
           <a:lstStyle/>
           <a:p>
-            <a:endParaRPr lang="en-GB"/>
+            <a:endParaRPr lang="en-GB" dirty="0"/>
           </a:p>
         </p:txBody>
       </p:sp>
@@ -9535,11 +9586,15 @@
                 </a:solidFill>
                 <a:latin typeface="Raleway"/>
               </a:rPr>
-              <a:t>There Is a Better Way</a:t>
-            </a:r>
-          </a:p>
-          <a:p>
-            <a:pPr algn="l"/>
+              <a:t>Turas Changes That</a:t>
+            </a:r>
+          </a:p>
+          <a:p>
+            <a:pPr algn="l">
+              <a:spcAft>
+                <a:spcPts val="300"/>
+              </a:spcAft>
+            </a:pPr>
             <a:r>
               <a:rPr lang="en-GB" sz="1400" dirty="0">
                 <a:solidFill>
@@ -9547,7 +9602,7 @@
                 </a:solidFill>
                 <a:latin typeface="Source Sans Pro"/>
               </a:rPr>
-              <a:t>Most research ends up as a presentation rather than a resource. Turas changes that.</a:t>
+              <a:t>Most research ends up as a presentation rather than a resource. </a:t>
             </a:r>
           </a:p>
         </p:txBody>
@@ -9577,7 +9632,7 @@
           <a:bodyPr/>
           <a:lstStyle/>
           <a:p>
-            <a:endParaRPr lang="en-GB"/>
+            <a:endParaRPr lang="en-GB" dirty="0"/>
           </a:p>
         </p:txBody>
       </p:sp>
@@ -9636,7 +9691,7 @@
           <a:bodyPr/>
           <a:lstStyle/>
           <a:p>
-            <a:endParaRPr lang="en-GB"/>
+            <a:endParaRPr lang="en-GB" dirty="0"/>
           </a:p>
         </p:txBody>
       </p:sp>
@@ -9665,7 +9720,7 @@
           <a:bodyPr/>
           <a:lstStyle/>
           <a:p>
-            <a:endParaRPr lang="en-GB"/>
+            <a:endParaRPr lang="en-GB" dirty="0"/>
           </a:p>
         </p:txBody>
       </p:sp>
@@ -9694,7 +9749,7 @@
           <a:bodyPr/>
           <a:lstStyle/>
           <a:p>
-            <a:endParaRPr lang="en-GB"/>
+            <a:endParaRPr lang="en-GB" dirty="0"/>
           </a:p>
         </p:txBody>
       </p:sp>
@@ -9739,7 +9794,7 @@
                 </a:solidFill>
                 <a:latin typeface="Source Sans Pro"/>
               </a:rPr>
-              <a:t>WHY YOU CAN TRUST IT</a:t>
+              <a:t>THE CASE FOR TURAS </a:t>
             </a:r>
           </a:p>
         </p:txBody>
@@ -9852,7 +9907,7 @@
           <a:bodyPr/>
           <a:lstStyle/>
           <a:p>
-            <a:endParaRPr lang="en-GB"/>
+            <a:endParaRPr lang="en-GB" dirty="0"/>
           </a:p>
         </p:txBody>
       </p:sp>
@@ -9881,7 +9936,7 @@
           <a:bodyPr/>
           <a:lstStyle/>
           <a:p>
-            <a:endParaRPr lang="en-GB"/>
+            <a:endParaRPr lang="en-GB" dirty="0"/>
           </a:p>
         </p:txBody>
       </p:sp>
@@ -9914,7 +9969,7 @@
           <a:bodyPr/>
           <a:lstStyle/>
           <a:p>
-            <a:endParaRPr lang="en-GB"/>
+            <a:endParaRPr lang="en-GB" dirty="0"/>
           </a:p>
         </p:txBody>
       </p:sp>
@@ -9943,7 +9998,7 @@
           <a:bodyPr/>
           <a:lstStyle/>
           <a:p>
-            <a:endParaRPr lang="en-GB"/>
+            <a:endParaRPr lang="en-GB" dirty="0"/>
           </a:p>
         </p:txBody>
       </p:sp>
@@ -10028,7 +10083,7 @@
           <a:bodyPr/>
           <a:lstStyle/>
           <a:p>
-            <a:endParaRPr lang="en-GB"/>
+            <a:endParaRPr lang="en-GB" dirty="0"/>
           </a:p>
         </p:txBody>
       </p:sp>
@@ -10057,7 +10112,7 @@
           <a:bodyPr/>
           <a:lstStyle/>
           <a:p>
-            <a:endParaRPr lang="en-GB"/>
+            <a:endParaRPr lang="en-GB" dirty="0"/>
           </a:p>
         </p:txBody>
       </p:sp>
@@ -10142,7 +10197,7 @@
           <a:bodyPr/>
           <a:lstStyle/>
           <a:p>
-            <a:endParaRPr lang="en-GB"/>
+            <a:endParaRPr lang="en-GB" dirty="0"/>
           </a:p>
         </p:txBody>
       </p:sp>
@@ -10171,7 +10226,7 @@
           <a:bodyPr/>
           <a:lstStyle/>
           <a:p>
-            <a:endParaRPr lang="en-GB"/>
+            <a:endParaRPr lang="en-GB" dirty="0"/>
           </a:p>
         </p:txBody>
       </p:sp>
@@ -10256,7 +10311,7 @@
           <a:bodyPr/>
           <a:lstStyle/>
           <a:p>
-            <a:endParaRPr lang="en-GB"/>
+            <a:endParaRPr lang="en-GB" dirty="0"/>
           </a:p>
         </p:txBody>
       </p:sp>
@@ -10285,7 +10340,7 @@
           <a:bodyPr/>
           <a:lstStyle/>
           <a:p>
-            <a:endParaRPr lang="en-GB"/>
+            <a:endParaRPr lang="en-GB" dirty="0"/>
           </a:p>
         </p:txBody>
       </p:sp>
@@ -10370,7 +10425,7 @@
           <a:bodyPr/>
           <a:lstStyle/>
           <a:p>
-            <a:endParaRPr lang="en-GB"/>
+            <a:endParaRPr lang="en-GB" dirty="0"/>
           </a:p>
         </p:txBody>
       </p:sp>
@@ -10399,7 +10454,7 @@
           <a:bodyPr/>
           <a:lstStyle/>
           <a:p>
-            <a:endParaRPr lang="en-GB"/>
+            <a:endParaRPr lang="en-GB" dirty="0"/>
           </a:p>
         </p:txBody>
       </p:sp>
@@ -10450,7 +10505,7 @@
                 </a:solidFill>
                 <a:latin typeface="Source Sans Pro"/>
               </a:rPr>
-              <a:t>Works with any survey dataset, whether fieldwork was commissioned through us or not. Got old data gathering dust? We can re-run it through Turas and unlock insights you never extracted.</a:t>
+              <a:t>Works with any survey dataset, whether fieldwork was commissioned through us or not. Got old data gathering dust? We can re-run it through Turas and discover insights you never got to.</a:t>
             </a:r>
           </a:p>
         </p:txBody>
@@ -10498,7 +10553,7 @@
     </p:spTree>
     <p:extLst>
       <p:ext uri="{BB962C8B-B14F-4D97-AF65-F5344CB8AC3E}">
-        <p14:creationId xmlns:p14="http://schemas.microsoft.com/office/powerpoint/2010/main" val="250099717"/>
+        <p14:creationId xmlns:p14="http://schemas.microsoft.com/office/powerpoint/2010/main" val="1581918200"/>
       </p:ext>
     </p:extLst>
   </p:cSld>
@@ -10550,7 +10605,7 @@
           <a:bodyPr/>
           <a:lstStyle/>
           <a:p>
-            <a:endParaRPr lang="en-GB"/>
+            <a:endParaRPr lang="en-GB" dirty="0"/>
           </a:p>
         </p:txBody>
       </p:sp>
@@ -10579,7 +10634,7 @@
           <a:bodyPr/>
           <a:lstStyle/>
           <a:p>
-            <a:endParaRPr lang="en-GB"/>
+            <a:endParaRPr lang="en-GB" dirty="0"/>
           </a:p>
         </p:txBody>
       </p:sp>
@@ -10608,7 +10663,7 @@
           <a:bodyPr/>
           <a:lstStyle/>
           <a:p>
-            <a:endParaRPr lang="en-GB"/>
+            <a:endParaRPr lang="en-GB" dirty="0"/>
           </a:p>
         </p:txBody>
       </p:sp>
@@ -10647,20 +10702,14 @@
           <a:p>
             <a:pPr algn="ctr"/>
             <a:r>
-              <a:rPr lang="en-GB" sz="900" b="1">
+              <a:rPr lang="en-GB" sz="900" b="1" dirty="0">
                 <a:solidFill>
                   <a:srgbClr val="FFFFFF"/>
                 </a:solidFill>
                 <a:latin typeface="Source Sans Pro"/>
               </a:rPr>
-              <a:t>THE TECHNOLOGY</a:t>
-            </a:r>
-            <a:endParaRPr lang="en-GB" sz="900" b="1" dirty="0">
-              <a:solidFill>
-                <a:srgbClr val="FFFFFF"/>
-              </a:solidFill>
-              <a:latin typeface="Source Sans Pro"/>
-            </a:endParaRPr>
+              <a:t>THE  STATISTICS</a:t>
+            </a:r>
           </a:p>
         </p:txBody>
       </p:sp>
@@ -10772,7 +10821,7 @@
           <a:bodyPr/>
           <a:lstStyle/>
           <a:p>
-            <a:endParaRPr lang="en-GB"/>
+            <a:endParaRPr lang="en-GB" dirty="0"/>
           </a:p>
         </p:txBody>
       </p:sp>
@@ -10805,7 +10854,7 @@
           <a:bodyPr/>
           <a:lstStyle/>
           <a:p>
-            <a:endParaRPr lang="en-GB"/>
+            <a:endParaRPr lang="en-GB" dirty="0"/>
           </a:p>
         </p:txBody>
       </p:sp>
@@ -10906,7 +10955,7 @@
           <a:bodyPr/>
           <a:lstStyle/>
           <a:p>
-            <a:endParaRPr lang="en-GB"/>
+            <a:endParaRPr lang="en-GB" dirty="0"/>
           </a:p>
         </p:txBody>
       </p:sp>
@@ -10973,7 +11022,7 @@
                 </a:solidFill>
                 <a:latin typeface="Source Sans Pro"/>
               </a:rPr>
-              <a:t>Every calculation is inspectable. Methods can be examined and verified. Results trace back to underlying tables.</a:t>
+              <a:t>Every calculation is inspectable. Methods can be examined and verified. </a:t>
             </a:r>
           </a:p>
         </p:txBody>
@@ -11007,7 +11056,7 @@
           <a:bodyPr/>
           <a:lstStyle/>
           <a:p>
-            <a:endParaRPr lang="en-GB"/>
+            <a:endParaRPr lang="en-GB" dirty="0"/>
           </a:p>
         </p:txBody>
       </p:sp>
@@ -11114,7 +11163,7 @@
                 </a:solidFill>
                 <a:latin typeface="Source Sans Pro"/>
               </a:rPr>
-              <a:t>Every result traces directly back to the underlying tables.</a:t>
+              <a:t>Every result traces directly back to the underlying tables</a:t>
             </a:r>
           </a:p>
         </p:txBody>
@@ -11144,14 +11193,14 @@
           <a:bodyPr/>
           <a:lstStyle/>
           <a:p>
-            <a:endParaRPr lang="en-GB"/>
+            <a:endParaRPr lang="en-GB" dirty="0"/>
           </a:p>
         </p:txBody>
       </p:sp>
     </p:spTree>
     <p:extLst>
       <p:ext uri="{BB962C8B-B14F-4D97-AF65-F5344CB8AC3E}">
-        <p14:creationId xmlns:p14="http://schemas.microsoft.com/office/powerpoint/2010/main" val="2574987972"/>
+        <p14:creationId xmlns:p14="http://schemas.microsoft.com/office/powerpoint/2010/main" val="3972574563"/>
       </p:ext>
     </p:extLst>
   </p:cSld>
@@ -11209,7 +11258,7 @@
           <a:bodyPr/>
           <a:lstStyle/>
           <a:p>
-            <a:endParaRPr lang="en-GB"/>
+            <a:endParaRPr lang="en-GB" dirty="0"/>
           </a:p>
         </p:txBody>
       </p:sp>
@@ -11238,7 +11287,7 @@
           <a:bodyPr/>
           <a:lstStyle/>
           <a:p>
-            <a:endParaRPr lang="en-GB"/>
+            <a:endParaRPr lang="en-GB" dirty="0"/>
           </a:p>
         </p:txBody>
       </p:sp>
@@ -11267,7 +11316,7 @@
           <a:bodyPr/>
           <a:lstStyle/>
           <a:p>
-            <a:endParaRPr lang="en-GB"/>
+            <a:endParaRPr lang="en-GB" dirty="0"/>
           </a:p>
         </p:txBody>
       </p:sp>
@@ -11306,20 +11355,14 @@
           <a:p>
             <a:pPr algn="ctr"/>
             <a:r>
-              <a:rPr lang="en-GB" sz="900" b="1">
+              <a:rPr lang="en-GB" sz="900" b="1" dirty="0">
                 <a:solidFill>
                   <a:srgbClr val="FFFFFF"/>
                 </a:solidFill>
                 <a:latin typeface="Source Sans Pro"/>
               </a:rPr>
-              <a:t>THE SERVICE MODEL</a:t>
-            </a:r>
-            <a:endParaRPr lang="en-GB" sz="900" b="1" dirty="0">
-              <a:solidFill>
-                <a:srgbClr val="FFFFFF"/>
-              </a:solidFill>
-              <a:latin typeface="Source Sans Pro"/>
-            </a:endParaRPr>
+              <a:t>WHO'S BEHIND IT</a:t>
+            </a:r>
           </a:p>
         </p:txBody>
       </p:sp>
@@ -11431,7 +11474,7 @@
           <a:bodyPr/>
           <a:lstStyle/>
           <a:p>
-            <a:endParaRPr lang="en-GB"/>
+            <a:endParaRPr lang="en-GB" dirty="0"/>
           </a:p>
         </p:txBody>
       </p:sp>
@@ -11466,7 +11509,7 @@
                 </a:solidFill>
                 <a:latin typeface="Source Sans Pro"/>
               </a:rPr>
-              <a:t>Turas is not a self-service tool.</a:t>
+              <a:t>Turas is not a self-service tool</a:t>
             </a:r>
           </a:p>
         </p:txBody>
@@ -11500,7 +11543,7 @@
           <a:bodyPr/>
           <a:lstStyle/>
           <a:p>
-            <a:endParaRPr lang="en-GB"/>
+            <a:endParaRPr lang="en-GB" dirty="0"/>
           </a:p>
         </p:txBody>
       </p:sp>
@@ -11570,25 +11613,7 @@
                 </a:solidFill>
                 <a:latin typeface="Source Sans Pro"/>
               </a:rPr>
-              <a:t>The Research </a:t>
-            </a:r>
-            <a:r>
-              <a:rPr lang="en-GB" sz="1400" dirty="0" err="1">
-                <a:solidFill>
-                  <a:srgbClr val="4A5568"/>
-                </a:solidFill>
-                <a:latin typeface="Source Sans Pro"/>
-              </a:rPr>
-              <a:t>LampPost</a:t>
-            </a:r>
-            <a:r>
-              <a:rPr lang="en-GB" sz="1400" dirty="0">
-                <a:solidFill>
-                  <a:srgbClr val="4A5568"/>
-                </a:solidFill>
-                <a:latin typeface="Source Sans Pro"/>
-              </a:rPr>
-              <a:t> is an organisational member of the Southern African Marketing Research Association. </a:t>
+              <a:t>The Research LampPost is an organisational member of the Southern African Marketing Research Association. </a:t>
             </a:r>
           </a:p>
           <a:p>
@@ -11643,7 +11668,7 @@
           <a:bodyPr/>
           <a:lstStyle/>
           <a:p>
-            <a:endParaRPr lang="en-GB"/>
+            <a:endParaRPr lang="en-GB" dirty="0"/>
           </a:p>
         </p:txBody>
       </p:sp>
@@ -11792,14 +11817,14 @@
           <a:bodyPr/>
           <a:lstStyle/>
           <a:p>
-            <a:endParaRPr lang="en-GB"/>
+            <a:endParaRPr lang="en-GB" dirty="0"/>
           </a:p>
         </p:txBody>
       </p:sp>
     </p:spTree>
     <p:extLst>
       <p:ext uri="{BB962C8B-B14F-4D97-AF65-F5344CB8AC3E}">
-        <p14:creationId xmlns:p14="http://schemas.microsoft.com/office/powerpoint/2010/main" val="2902050641"/>
+        <p14:creationId xmlns:p14="http://schemas.microsoft.com/office/powerpoint/2010/main" val="306094212"/>
       </p:ext>
     </p:extLst>
   </p:cSld>
@@ -11857,7 +11882,7 @@
           <a:bodyPr/>
           <a:lstStyle/>
           <a:p>
-            <a:endParaRPr lang="en-GB"/>
+            <a:endParaRPr lang="en-GB" dirty="0"/>
           </a:p>
         </p:txBody>
       </p:sp>
@@ -11886,7 +11911,7 @@
           <a:bodyPr/>
           <a:lstStyle/>
           <a:p>
-            <a:endParaRPr lang="en-GB"/>
+            <a:endParaRPr lang="en-GB" dirty="0"/>
           </a:p>
         </p:txBody>
       </p:sp>
@@ -11915,7 +11940,7 @@
           <a:bodyPr/>
           <a:lstStyle/>
           <a:p>
-            <a:endParaRPr lang="en-GB"/>
+            <a:endParaRPr lang="en-GB" dirty="0"/>
           </a:p>
         </p:txBody>
       </p:sp>
@@ -11954,7 +11979,7 @@
           <a:p>
             <a:pPr algn="ctr"/>
             <a:r>
-              <a:rPr lang="en-GB" sz="900" b="1">
+              <a:rPr lang="en-GB" sz="900" b="1" dirty="0">
                 <a:solidFill>
                   <a:srgbClr val="FFFFFF"/>
                 </a:solidFill>
@@ -11962,12 +11987,6 @@
               </a:rPr>
               <a:t>DATA SECURITY</a:t>
             </a:r>
-            <a:endParaRPr lang="en-GB" sz="900" b="1" dirty="0">
-              <a:solidFill>
-                <a:srgbClr val="FFFFFF"/>
-              </a:solidFill>
-              <a:latin typeface="Source Sans Pro"/>
-            </a:endParaRPr>
           </a:p>
         </p:txBody>
       </p:sp>
@@ -12079,7 +12098,7 @@
           <a:bodyPr/>
           <a:lstStyle/>
           <a:p>
-            <a:endParaRPr lang="en-GB"/>
+            <a:endParaRPr lang="en-GB" dirty="0"/>
           </a:p>
         </p:txBody>
       </p:sp>
@@ -12112,7 +12131,7 @@
           <a:bodyPr/>
           <a:lstStyle/>
           <a:p>
-            <a:endParaRPr lang="en-GB"/>
+            <a:endParaRPr lang="en-GB" dirty="0"/>
           </a:p>
         </p:txBody>
       </p:sp>
@@ -12167,7 +12186,7 @@
                 </a:solidFill>
                 <a:latin typeface="Raleway"/>
               </a:rPr>
-              <a:t>Data Security</a:t>
+              <a:t>Completely Handled In-House</a:t>
             </a:r>
           </a:p>
           <a:p>
@@ -12183,7 +12202,7 @@
                 </a:solidFill>
                 <a:latin typeface="Source Sans Pro"/>
               </a:rPr>
-              <a:t>Your data is analysed entirely on our own hardware — never processed by a third-party analytical platform or shared with an external service</a:t>
+              <a:t>Your data is analysed entirely on our own hardware — never processed by a third-party analytical platform or shared with an external service.</a:t>
             </a:r>
           </a:p>
         </p:txBody>
@@ -12217,7 +12236,7 @@
           <a:bodyPr/>
           <a:lstStyle/>
           <a:p>
-            <a:endParaRPr lang="en-GB"/>
+            <a:endParaRPr lang="en-GB" dirty="0"/>
           </a:p>
         </p:txBody>
       </p:sp>
@@ -12284,7 +12303,7 @@
                 </a:solidFill>
                 <a:latin typeface="Source Sans Pro"/>
               </a:rPr>
-              <a:t>The delivered report is finalised and self-contained — it cannot be altered after the fact</a:t>
+              <a:t>The delivered report is finalised and self-contained — it cannot be altered after the fact.</a:t>
             </a:r>
           </a:p>
         </p:txBody>
@@ -12324,7 +12343,7 @@
                 </a:solidFill>
                 <a:latin typeface="Source Sans Pro"/>
               </a:rPr>
-              <a:t>A stable record of exactly what the data showed at the time of analysis.</a:t>
+              <a:t>A stable record of exactly what the data showed at the time of analysis</a:t>
             </a:r>
           </a:p>
         </p:txBody>
@@ -12354,14 +12373,14 @@
           <a:bodyPr/>
           <a:lstStyle/>
           <a:p>
-            <a:endParaRPr lang="en-GB"/>
+            <a:endParaRPr lang="en-GB" dirty="0"/>
           </a:p>
         </p:txBody>
       </p:sp>
     </p:spTree>
     <p:extLst>
       <p:ext uri="{BB962C8B-B14F-4D97-AF65-F5344CB8AC3E}">
-        <p14:creationId xmlns:p14="http://schemas.microsoft.com/office/powerpoint/2010/main" val="3237501686"/>
+        <p14:creationId xmlns:p14="http://schemas.microsoft.com/office/powerpoint/2010/main" val="4042445361"/>
       </p:ext>
     </p:extLst>
   </p:cSld>
@@ -12419,7 +12438,7 @@
           <a:bodyPr/>
           <a:lstStyle/>
           <a:p>
-            <a:endParaRPr lang="en-GB"/>
+            <a:endParaRPr lang="en-GB" dirty="0"/>
           </a:p>
         </p:txBody>
       </p:sp>
@@ -12448,7 +12467,7 @@
           <a:bodyPr/>
           <a:lstStyle/>
           <a:p>
-            <a:endParaRPr lang="en-GB"/>
+            <a:endParaRPr lang="en-GB" dirty="0"/>
           </a:p>
         </p:txBody>
       </p:sp>
@@ -12477,7 +12496,7 @@
           <a:bodyPr/>
           <a:lstStyle/>
           <a:p>
-            <a:endParaRPr lang="en-GB"/>
+            <a:endParaRPr lang="en-GB" dirty="0"/>
           </a:p>
         </p:txBody>
       </p:sp>
@@ -12516,7 +12535,7 @@
           <a:p>
             <a:pPr algn="ctr"/>
             <a:r>
-              <a:rPr lang="en-GB" sz="900" b="1">
+              <a:rPr lang="en-GB" sz="900" b="1" dirty="0">
                 <a:solidFill>
                   <a:srgbClr val="FFFFFF"/>
                 </a:solidFill>
@@ -12524,12 +12543,6 @@
               </a:rPr>
               <a:t>SPEED &amp; RELIABILITY</a:t>
             </a:r>
-            <a:endParaRPr lang="en-GB" sz="900" b="1" dirty="0">
-              <a:solidFill>
-                <a:srgbClr val="FFFFFF"/>
-              </a:solidFill>
-              <a:latin typeface="Source Sans Pro"/>
-            </a:endParaRPr>
           </a:p>
         </p:txBody>
       </p:sp>
@@ -12641,7 +12654,7 @@
           <a:bodyPr/>
           <a:lstStyle/>
           <a:p>
-            <a:endParaRPr lang="en-GB"/>
+            <a:endParaRPr lang="en-GB" dirty="0"/>
           </a:p>
         </p:txBody>
       </p:sp>
@@ -12670,7 +12683,7 @@
           <a:bodyPr/>
           <a:lstStyle/>
           <a:p>
-            <a:endParaRPr lang="en-GB"/>
+            <a:endParaRPr lang="en-GB" dirty="0"/>
           </a:p>
         </p:txBody>
       </p:sp>
@@ -12857,7 +12870,7 @@
           <a:bodyPr/>
           <a:lstStyle/>
           <a:p>
-            <a:endParaRPr lang="en-GB"/>
+            <a:endParaRPr lang="en-GB" dirty="0"/>
           </a:p>
         </p:txBody>
       </p:sp>
@@ -12886,7 +12899,7 @@
           <a:bodyPr/>
           <a:lstStyle/>
           <a:p>
-            <a:endParaRPr lang="en-GB"/>
+            <a:endParaRPr lang="en-GB" dirty="0"/>
           </a:p>
         </p:txBody>
       </p:sp>
@@ -12977,7 +12990,7 @@
                 </a:solidFill>
                 <a:latin typeface="Source Sans Pro"/>
               </a:rPr>
-              <a:t>Controlled computational environment. Reproducible results. Every time.</a:t>
+              <a:t>Controlled computational environment. Reproducible results. Every time</a:t>
             </a:r>
           </a:p>
         </p:txBody>
@@ -12985,7 +12998,7 @@
     </p:spTree>
     <p:extLst>
       <p:ext uri="{BB962C8B-B14F-4D97-AF65-F5344CB8AC3E}">
-        <p14:creationId xmlns:p14="http://schemas.microsoft.com/office/powerpoint/2010/main" val="3920869038"/>
+        <p14:creationId xmlns:p14="http://schemas.microsoft.com/office/powerpoint/2010/main" val="744421901"/>
       </p:ext>
     </p:extLst>
   </p:cSld>
@@ -13049,7 +13062,7 @@
           <a:bodyPr/>
           <a:lstStyle/>
           <a:p>
-            <a:endParaRPr lang="en-GB"/>
+            <a:endParaRPr lang="en-GB" dirty="0"/>
           </a:p>
         </p:txBody>
       </p:sp>
@@ -13084,7 +13097,7 @@
           <a:bodyPr/>
           <a:lstStyle/>
           <a:p>
-            <a:endParaRPr lang="en-GB"/>
+            <a:endParaRPr lang="en-GB" dirty="0"/>
           </a:p>
         </p:txBody>
       </p:sp>
@@ -13119,7 +13132,7 @@
           <a:bodyPr/>
           <a:lstStyle/>
           <a:p>
-            <a:endParaRPr lang="en-GB"/>
+            <a:endParaRPr lang="en-GB" dirty="0"/>
           </a:p>
         </p:txBody>
       </p:sp>
@@ -13164,7 +13177,7 @@
           <a:p>
             <a:pPr algn="ctr"/>
             <a:r>
-              <a:rPr lang="en-GB" sz="900" b="1">
+              <a:rPr lang="en-GB" sz="900" b="1" dirty="0">
                 <a:solidFill>
                   <a:srgbClr val="FFFFFF"/>
                 </a:solidFill>
@@ -13172,12 +13185,6 @@
               </a:rPr>
               <a:t>THE DELIVERABLE</a:t>
             </a:r>
-            <a:endParaRPr lang="en-GB" sz="900" b="1" dirty="0">
-              <a:solidFill>
-                <a:srgbClr val="FFFFFF"/>
-              </a:solidFill>
-              <a:latin typeface="Source Sans Pro"/>
-            </a:endParaRPr>
           </a:p>
         </p:txBody>
       </p:sp>
@@ -13256,7 +13263,7 @@
           <a:bodyPr/>
           <a:lstStyle/>
           <a:p>
-            <a:endParaRPr lang="en-GB"/>
+            <a:endParaRPr lang="en-GB" dirty="0"/>
           </a:p>
         </p:txBody>
       </p:sp>
@@ -13342,7 +13349,7 @@
           <a:bodyPr/>
           <a:lstStyle/>
           <a:p>
-            <a:endParaRPr lang="en-GB"/>
+            <a:endParaRPr lang="en-GB" dirty="0"/>
           </a:p>
         </p:txBody>
       </p:sp>
@@ -13441,7 +13448,7 @@
           <a:bodyPr/>
           <a:lstStyle/>
           <a:p>
-            <a:endParaRPr lang="en-GB"/>
+            <a:endParaRPr lang="en-GB" dirty="0"/>
           </a:p>
         </p:txBody>
       </p:sp>
@@ -13586,7 +13593,7 @@
           <a:bodyPr/>
           <a:lstStyle/>
           <a:p>
-            <a:endParaRPr lang="en-GB"/>
+            <a:endParaRPr lang="en-GB" dirty="0"/>
           </a:p>
         </p:txBody>
       </p:sp>
@@ -13691,7 +13698,7 @@
                 </a:solidFill>
                 <a:latin typeface="Source Sans Pro"/>
               </a:rPr>
-              <a:t>✔  So intuitive, minimal training needed</a:t>
+              <a:t>✔  Intuitive enough for anyone on your team — minimal training needed</a:t>
             </a:r>
           </a:p>
         </p:txBody>
@@ -13731,7 +13738,7 @@
           <a:bodyPr/>
           <a:lstStyle/>
           <a:p>
-            <a:endParaRPr lang="en-GB"/>
+            <a:endParaRPr lang="en-GB" dirty="0"/>
           </a:p>
         </p:txBody>
       </p:sp>
@@ -13766,7 +13773,7 @@
           <a:bodyPr/>
           <a:lstStyle/>
           <a:p>
-            <a:endParaRPr lang="en-GB"/>
+            <a:endParaRPr lang="en-GB" dirty="0"/>
           </a:p>
         </p:txBody>
       </p:sp>
@@ -13823,7 +13830,7 @@
                 </a:solidFill>
                 <a:latin typeface="Source Sans Pro"/>
               </a:rPr>
-              <a:t>Nothing to install. Open a link and go.</a:t>
+              <a:t>Nothing to install. Open a link and go</a:t>
             </a:r>
           </a:p>
         </p:txBody>
@@ -13863,7 +13870,7 @@
           <a:bodyPr/>
           <a:lstStyle/>
           <a:p>
-            <a:endParaRPr lang="en-GB"/>
+            <a:endParaRPr lang="en-GB" dirty="0"/>
           </a:p>
         </p:txBody>
       </p:sp>
@@ -13898,7 +13905,7 @@
           <a:bodyPr/>
           <a:lstStyle/>
           <a:p>
-            <a:endParaRPr lang="en-GB"/>
+            <a:endParaRPr lang="en-GB" dirty="0"/>
           </a:p>
         </p:txBody>
       </p:sp>
@@ -13955,7 +13962,7 @@
                 </a:solidFill>
                 <a:latin typeface="Source Sans Pro"/>
               </a:rPr>
-              <a:t>Switch between views with one click.</a:t>
+              <a:t>Switch between views with one click</a:t>
             </a:r>
           </a:p>
         </p:txBody>
@@ -13995,7 +14002,7 @@
           <a:bodyPr/>
           <a:lstStyle/>
           <a:p>
-            <a:endParaRPr lang="en-GB"/>
+            <a:endParaRPr lang="en-GB" dirty="0"/>
           </a:p>
         </p:txBody>
       </p:sp>
@@ -14030,7 +14037,7 @@
           <a:bodyPr/>
           <a:lstStyle/>
           <a:p>
-            <a:endParaRPr lang="en-GB"/>
+            <a:endParaRPr lang="en-GB" dirty="0"/>
           </a:p>
         </p:txBody>
       </p:sp>
@@ -14087,7 +14094,7 @@
                 </a:solidFill>
                 <a:latin typeface="Source Sans Pro"/>
               </a:rPr>
-              <a:t>Pull any table into Excel whenever you need it.</a:t>
+              <a:t>Pull any table into Excel whenever you need it</a:t>
             </a:r>
           </a:p>
         </p:txBody>
@@ -14133,7 +14140,7 @@
                 </a:solidFill>
                 <a:latin typeface="Source Sans Pro"/>
               </a:rPr>
-              <a:t>Not a dashboard. Not a PDF. A living report your whole team can explore.</a:t>
+              <a:t>Not a dashboard. Not a PDF. A living report your whole team can explore</a:t>
             </a:r>
           </a:p>
         </p:txBody>
@@ -14141,7 +14148,7 @@
     </p:spTree>
     <p:extLst>
       <p:ext uri="{BB962C8B-B14F-4D97-AF65-F5344CB8AC3E}">
-        <p14:creationId xmlns:p14="http://schemas.microsoft.com/office/powerpoint/2010/main" val="2652254252"/>
+        <p14:creationId xmlns:p14="http://schemas.microsoft.com/office/powerpoint/2010/main" val="1730384472"/>
       </p:ext>
     </p:extLst>
   </p:cSld>
@@ -14182,7 +14189,7 @@
         </p:nvSpPr>
         <p:spPr>
           <a:xfrm>
-            <a:off x="0" y="0"/>
+            <a:off x="0" y="12192"/>
             <a:ext cx="12192000" cy="6858000"/>
           </a:xfrm>
           <a:prstGeom prst="rect">
@@ -14199,7 +14206,7 @@
           <a:bodyPr/>
           <a:lstStyle/>
           <a:p>
-            <a:endParaRPr lang="en-GB"/>
+            <a:endParaRPr lang="en-GB" dirty="0"/>
           </a:p>
         </p:txBody>
       </p:sp>
@@ -14228,7 +14235,7 @@
           <a:bodyPr/>
           <a:lstStyle/>
           <a:p>
-            <a:endParaRPr lang="en-GB"/>
+            <a:endParaRPr lang="en-GB" dirty="0"/>
           </a:p>
         </p:txBody>
       </p:sp>
@@ -14257,7 +14264,7 @@
           <a:bodyPr/>
           <a:lstStyle/>
           <a:p>
-            <a:endParaRPr lang="en-GB"/>
+            <a:endParaRPr lang="en-GB" dirty="0"/>
           </a:p>
         </p:txBody>
       </p:sp>
@@ -14278,25 +14285,37 @@
             </a:avLst>
           </a:prstGeom>
           <a:solidFill>
-            <a:srgbClr val="CC9900"/>
-          </a:solidFill>
-          <a:ln>
-            <a:noFill/>
-          </a:ln>
-        </p:spPr>
-        <p:txBody>
-          <a:bodyPr wrap="square" lIns="91440" tIns="0" rIns="91440" bIns="0" anchor="ctr"/>
-          <a:lstStyle/>
-          <a:p>
-            <a:pPr algn="ctr"/>
-            <a:r>
-              <a:rPr lang="en-GB" sz="900" b="1" dirty="0">
+            <a:srgbClr val="CC9900">
+              <a:alpha val="20000"/>
+            </a:srgbClr>
+          </a:solidFill>
+          <a:ln>
+            <a:solidFill>
+              <a:srgbClr val="CC9900">
+                <a:alpha val="40000"/>
+              </a:srgbClr>
+            </a:solidFill>
+          </a:ln>
+        </p:spPr>
+        <p:txBody>
+          <a:bodyPr wrap="none" lIns="91440" tIns="0" rIns="91440" bIns="0" anchor="ctr"/>
+          <a:lstStyle>
+            <a:defPPr>
+              <a:defRPr lang="en-US"/>
+            </a:defPPr>
+            <a:lvl1pPr algn="ctr">
+              <a:defRPr sz="900" b="1">
                 <a:solidFill>
                   <a:srgbClr val="FFFFFF"/>
                 </a:solidFill>
                 <a:latin typeface="Source Sans Pro"/>
-              </a:rPr>
-              <a:t>THE DELIVERABLE</a:t>
+              </a:defRPr>
+            </a:lvl1pPr>
+          </a:lstStyle>
+          <a:p>
+            <a:r>
+              <a:rPr lang="en-GB" dirty="0"/>
+              <a:t> THE DIFFERENCE</a:t>
             </a:r>
           </a:p>
         </p:txBody>
@@ -14409,7 +14428,7 @@
           <a:bodyPr/>
           <a:lstStyle/>
           <a:p>
-            <a:endParaRPr lang="en-GB"/>
+            <a:endParaRPr lang="en-GB" dirty="0"/>
           </a:p>
         </p:txBody>
       </p:sp>
@@ -14430,19 +14449,17 @@
             </a:avLst>
           </a:prstGeom>
           <a:solidFill>
-            <a:srgbClr val="E8E8EC"/>
-          </a:solidFill>
-          <a:ln w="12700">
-            <a:solidFill>
-              <a:srgbClr val="C0C0C8"/>
-            </a:solidFill>
-          </a:ln>
-        </p:spPr>
-        <p:txBody>
-          <a:bodyPr/>
-          <a:lstStyle/>
-          <a:p>
-            <a:endParaRPr lang="en-GB"/>
+            <a:srgbClr val="1A2040"/>
+          </a:solidFill>
+          <a:ln>
+            <a:noFill/>
+          </a:ln>
+        </p:spPr>
+        <p:txBody>
+          <a:bodyPr/>
+          <a:lstStyle/>
+          <a:p>
+            <a:endParaRPr lang="en-GB" dirty="0"/>
           </a:p>
         </p:txBody>
       </p:sp>
@@ -14473,7 +14490,7 @@
             <a:r>
               <a:rPr lang="en-GB" sz="1800" b="1" dirty="0">
                 <a:solidFill>
-                  <a:srgbClr val="6B6B80"/>
+                  <a:srgbClr val="C0C0D0"/>
                 </a:solidFill>
                 <a:latin typeface="Raleway"/>
               </a:rPr>
@@ -14499,7 +14516,7 @@
             </a:avLst>
           </a:prstGeom>
           <a:solidFill>
-            <a:srgbClr val="1A2040"/>
+            <a:srgbClr val="F7F8FB"/>
           </a:solidFill>
           <a:ln w="19050">
             <a:solidFill>
@@ -14511,7 +14528,7 @@
           <a:bodyPr/>
           <a:lstStyle/>
           <a:p>
-            <a:endParaRPr lang="en-GB"/>
+            <a:endParaRPr lang="en-GB" dirty="0"/>
           </a:p>
         </p:txBody>
       </p:sp>
@@ -14542,7 +14559,7 @@
             <a:r>
               <a:rPr lang="en-GB" sz="1800" b="1" dirty="0">
                 <a:solidFill>
-                  <a:srgbClr val="CC9900"/>
+                  <a:srgbClr val="323367"/>
                 </a:solidFill>
                 <a:latin typeface="Raleway"/>
               </a:rPr>
@@ -14596,38 +14613,6 @@
           </a:p>
         </p:txBody>
       </p:sp>
-      <p:pic>
-        <p:nvPicPr>
-          <p:cNvPr id="6" name="Picture 5" descr="A screenshot of a table&#10;&#10;AI-generated content may be incorrect.">
-            <a:extLst>
-              <a:ext uri="{FF2B5EF4-FFF2-40B4-BE49-F238E27FC236}">
-                <a16:creationId xmlns:a16="http://schemas.microsoft.com/office/drawing/2014/main" id="{BD9D1F19-CA6A-E1DF-4DC4-9D982E0D5CEA}"/>
-              </a:ext>
-            </a:extLst>
-          </p:cNvPr>
-          <p:cNvPicPr>
-            <a:picLocks noChangeAspect="1"/>
-          </p:cNvPicPr>
-          <p:nvPr/>
-        </p:nvPicPr>
-        <p:blipFill>
-          <a:blip r:embed="rId3"/>
-          <a:stretch>
-            <a:fillRect/>
-          </a:stretch>
-        </p:blipFill>
-        <p:spPr>
-          <a:xfrm>
-            <a:off x="762000" y="2311400"/>
-            <a:ext cx="4648200" cy="1026984"/>
-          </a:xfrm>
-          <a:prstGeom prst="roundRect">
-            <a:avLst>
-              <a:gd name="adj" fmla="val 3000"/>
-            </a:avLst>
-          </a:prstGeom>
-        </p:spPr>
-      </p:pic>
       <p:sp>
         <p:nvSpPr>
           <p:cNvPr id="250" name="LeftBullets"/>
@@ -14661,29 +14646,11 @@
             <a:r>
               <a:rPr lang="en-GB" sz="1400" dirty="0">
                 <a:solidFill>
-                  <a:srgbClr val="8B8BA0"/>
+                  <a:srgbClr val="9090A8"/>
                 </a:solidFill>
                 <a:latin typeface="Source Sans Pro"/>
               </a:rPr>
-              <a:t>  Static rows </a:t>
-            </a:r>
-            <a:r>
-              <a:rPr lang="en-GB" sz="1400" dirty="0">
-                <a:solidFill>
-                  <a:srgbClr val="ABABBA"/>
-                </a:solidFill>
-                <a:latin typeface="Source Sans Pro"/>
-              </a:rPr>
-              <a:t>&amp;</a:t>
-            </a:r>
-            <a:r>
-              <a:rPr lang="en-GB" sz="1400" dirty="0">
-                <a:solidFill>
-                  <a:srgbClr val="8B8BA0"/>
-                </a:solidFill>
-                <a:latin typeface="Source Sans Pro"/>
-              </a:rPr>
-              <a:t> columns nobody reads</a:t>
+              <a:t>  Static rows and columns that are hard to read</a:t>
             </a:r>
           </a:p>
           <a:p>
@@ -14697,7 +14664,7 @@
             <a:r>
               <a:rPr lang="en-GB" sz="1400" dirty="0">
                 <a:solidFill>
-                  <a:srgbClr val="8B8BA0"/>
+                  <a:srgbClr val="9090A8"/>
                 </a:solidFill>
                 <a:latin typeface="Source Sans Pro"/>
               </a:rPr>
@@ -14715,11 +14682,11 @@
             <a:r>
               <a:rPr lang="en-GB" sz="1400" dirty="0">
                 <a:solidFill>
-                  <a:srgbClr val="8B8BA0"/>
+                  <a:srgbClr val="9090A8"/>
                 </a:solidFill>
                 <a:latin typeface="Source Sans Pro"/>
               </a:rPr>
-              <a:t>  Dead on arrival</a:t>
+              <a:t>  Filed away, rarely revisited</a:t>
             </a:r>
           </a:p>
         </p:txBody>
@@ -14757,7 +14724,7 @@
             <a:r>
               <a:rPr lang="en-GB" sz="1400" dirty="0">
                 <a:solidFill>
-                  <a:srgbClr val="CC9900"/>
+                  <a:srgbClr val="323367"/>
                 </a:solidFill>
                 <a:latin typeface="Source Sans Pro"/>
               </a:rPr>
@@ -14775,7 +14742,7 @@
             <a:r>
               <a:rPr lang="en-GB" sz="1400" dirty="0">
                 <a:solidFill>
-                  <a:srgbClr val="CC9900"/>
+                  <a:srgbClr val="323367"/>
                 </a:solidFill>
                 <a:latin typeface="Source Sans Pro"/>
               </a:rPr>
@@ -14799,6 +14766,103 @@
           <p:nvPr/>
         </p:nvPicPr>
         <p:blipFill>
+          <a:blip r:embed="rId3"/>
+          <a:stretch>
+            <a:fillRect/>
+          </a:stretch>
+        </p:blipFill>
+        <p:spPr>
+          <a:xfrm>
+            <a:off x="6915912" y="2240118"/>
+            <a:ext cx="4373880" cy="3027565"/>
+          </a:xfrm>
+          <a:prstGeom prst="roundRect">
+            <a:avLst>
+              <a:gd name="adj" fmla="val 3000"/>
+            </a:avLst>
+          </a:prstGeom>
+        </p:spPr>
+      </p:pic>
+      <p:sp>
+        <p:nvSpPr>
+          <p:cNvPr id="150" name="BA"/>
+          <p:cNvSpPr/>
+          <p:nvPr/>
+        </p:nvSpPr>
+        <p:spPr>
+          <a:xfrm>
+            <a:off x="0" y="6807200"/>
+            <a:ext cx="12192000" cy="50800"/>
+          </a:xfrm>
+          <a:prstGeom prst="rect">
+            <a:avLst/>
+          </a:prstGeom>
+          <a:solidFill>
+            <a:srgbClr val="CC9900"/>
+          </a:solidFill>
+          <a:ln>
+            <a:noFill/>
+          </a:ln>
+        </p:spPr>
+        <p:txBody>
+          <a:bodyPr/>
+          <a:lstStyle/>
+          <a:p>
+            <a:endParaRPr lang="en-GB" dirty="0"/>
+          </a:p>
+        </p:txBody>
+      </p:sp>
+      <p:sp>
+        <p:nvSpPr>
+          <p:cNvPr id="240" name="Call"/>
+          <p:cNvSpPr txBox="1"/>
+          <p:nvPr/>
+        </p:nvSpPr>
+        <p:spPr>
+          <a:xfrm>
+            <a:off x="762000" y="6172200"/>
+            <a:ext cx="10668000" cy="457200"/>
+          </a:xfrm>
+          <a:prstGeom prst="rect">
+            <a:avLst/>
+          </a:prstGeom>
+          <a:noFill/>
+          <a:ln>
+            <a:noFill/>
+          </a:ln>
+        </p:spPr>
+        <p:txBody>
+          <a:bodyPr wrap="square" anchor="ctr"/>
+          <a:lstStyle/>
+          <a:p>
+            <a:pPr algn="ctr"/>
+            <a:r>
+              <a:rPr lang="en-GB" sz="1400" i="1" dirty="0">
+                <a:solidFill>
+                  <a:srgbClr val="CC9900"/>
+                </a:solidFill>
+                <a:latin typeface="Source Sans Pro"/>
+              </a:rPr>
+              <a:t>Not a dashboard. Not a PDF. A living report your whole team can explore</a:t>
+            </a:r>
+          </a:p>
+        </p:txBody>
+      </p:sp>
+      <p:pic>
+        <p:nvPicPr>
+          <p:cNvPr id="3" name="Picture 2" descr="A white calendar with numbers&#10;&#10;AI-generated content may be incorrect.">
+            <a:extLst>
+              <a:ext uri="{FF2B5EF4-FFF2-40B4-BE49-F238E27FC236}">
+                <a16:creationId xmlns:a16="http://schemas.microsoft.com/office/drawing/2014/main" id="{63135029-E7DF-B1CD-6713-29D76A6D1BFA}"/>
+              </a:ext>
+            </a:extLst>
+          </p:cNvPr>
+          <p:cNvPicPr>
+            <a:picLocks noChangeAspect="1"/>
+          </p:cNvPicPr>
+          <p:nvPr/>
+        </p:nvPicPr>
+        <p:blipFill>
           <a:blip r:embed="rId4"/>
           <a:stretch>
             <a:fillRect/>
@@ -14806,8 +14870,8 @@
         </p:blipFill>
         <p:spPr>
           <a:xfrm>
-            <a:off x="6915912" y="2240118"/>
-            <a:ext cx="4373880" cy="3027565"/>
+            <a:off x="729996" y="2257044"/>
+            <a:ext cx="4692460" cy="1286255"/>
           </a:xfrm>
           <a:prstGeom prst="roundRect">
             <a:avLst>
@@ -14816,75 +14880,10 @@
           </a:prstGeom>
         </p:spPr>
       </p:pic>
-      <p:sp>
-        <p:nvSpPr>
-          <p:cNvPr id="150" name="BA"/>
-          <p:cNvSpPr/>
-          <p:nvPr/>
-        </p:nvSpPr>
-        <p:spPr>
-          <a:xfrm>
-            <a:off x="0" y="6807200"/>
-            <a:ext cx="12192000" cy="50800"/>
-          </a:xfrm>
-          <a:prstGeom prst="rect">
-            <a:avLst/>
-          </a:prstGeom>
-          <a:solidFill>
-            <a:srgbClr val="CC9900"/>
-          </a:solidFill>
-          <a:ln>
-            <a:noFill/>
-          </a:ln>
-        </p:spPr>
-        <p:txBody>
-          <a:bodyPr/>
-          <a:lstStyle/>
-          <a:p>
-            <a:endParaRPr lang="en-GB"/>
-          </a:p>
-        </p:txBody>
-      </p:sp>
-      <p:sp>
-        <p:nvSpPr>
-          <p:cNvPr id="240" name="Call"/>
-          <p:cNvSpPr txBox="1"/>
-          <p:nvPr/>
-        </p:nvSpPr>
-        <p:spPr>
-          <a:xfrm>
-            <a:off x="762000" y="6172200"/>
-            <a:ext cx="10668000" cy="457200"/>
-          </a:xfrm>
-          <a:prstGeom prst="rect">
-            <a:avLst/>
-          </a:prstGeom>
-          <a:noFill/>
-          <a:ln>
-            <a:noFill/>
-          </a:ln>
-        </p:spPr>
-        <p:txBody>
-          <a:bodyPr wrap="square" anchor="ctr"/>
-          <a:lstStyle/>
-          <a:p>
-            <a:pPr algn="ctr"/>
-            <a:r>
-              <a:rPr lang="en-GB" sz="1400" i="1" dirty="0">
-                <a:solidFill>
-                  <a:srgbClr val="CC9900"/>
-                </a:solidFill>
-                <a:latin typeface="Source Sans Pro"/>
-              </a:rPr>
-              <a:t>Not a dashboard. Not a PDF. A living report your whole team can explore.</a:t>
-            </a:r>
-          </a:p>
-        </p:txBody>
-      </p:sp>
     </p:spTree>
     <p:extLst>
       <p:ext uri="{BB962C8B-B14F-4D97-AF65-F5344CB8AC3E}">
-        <p14:creationId xmlns:p14="http://schemas.microsoft.com/office/powerpoint/2010/main" val="1451553474"/>
+        <p14:creationId xmlns:p14="http://schemas.microsoft.com/office/powerpoint/2010/main" val="3487450779"/>
       </p:ext>
     </p:extLst>
   </p:cSld>
